--- a/EOS updates.pptx
+++ b/EOS updates.pptx
@@ -5,12 +5,13 @@
     <p:sldMasterId id="2147483708" r:id="rId1"/>
   </p:sldMasterIdLst>
   <p:notesMasterIdLst>
-    <p:notesMasterId r:id="rId5"/>
+    <p:notesMasterId r:id="rId6"/>
   </p:notesMasterIdLst>
   <p:sldIdLst>
     <p:sldId id="258" r:id="rId2"/>
     <p:sldId id="259" r:id="rId3"/>
-    <p:sldId id="260" r:id="rId4"/>
+    <p:sldId id="261" r:id="rId4"/>
+    <p:sldId id="260" r:id="rId5"/>
   </p:sldIdLst>
   <p:sldSz cx="12192000" cy="6858000"/>
   <p:notesSz cx="6858000" cy="9144000"/>
@@ -217,7 +218,7 @@
           <a:p>
             <a:fld id="{AB81B2D2-06A2-4596-9391-656CA05E965F}" type="datetimeFigureOut">
               <a:rPr lang="et-EE" smtClean="0"/>
-              <a:t>04.09.2025</a:t>
+              <a:t>05.09.2025</a:t>
             </a:fld>
             <a:endParaRPr lang="et-EE"/>
           </a:p>
@@ -631,7 +632,7 @@
           <a:p>
             <a:fld id="{0E412FDE-1CFE-48F6-820F-9C443C301228}" type="datetime1">
               <a:rPr lang="et-EE" smtClean="0"/>
-              <a:t>04.09.2025</a:t>
+              <a:t>05.09.2025</a:t>
             </a:fld>
             <a:endParaRPr lang="et-EE" dirty="0"/>
           </a:p>
@@ -815,7 +816,7 @@
           <a:p>
             <a:fld id="{B64C0CFC-214E-42F4-8B82-CC6D451BD70F}" type="datetime1">
               <a:rPr lang="et-EE" smtClean="0"/>
-              <a:t>04.09.2025</a:t>
+              <a:t>05.09.2025</a:t>
             </a:fld>
             <a:endParaRPr lang="et-EE"/>
           </a:p>
@@ -998,7 +999,7 @@
           <a:p>
             <a:fld id="{5AB58BF1-41C1-47B8-ACAE-F9884B88C63A}" type="datetime1">
               <a:rPr lang="et-EE" smtClean="0"/>
-              <a:t>04.09.2025</a:t>
+              <a:t>05.09.2025</a:t>
             </a:fld>
             <a:endParaRPr lang="et-EE"/>
           </a:p>
@@ -1260,7 +1261,7 @@
           <a:p>
             <a:fld id="{E1CF8E31-244F-4A6A-A7D5-704B96C48AAE}" type="datetime1">
               <a:rPr lang="et-EE" smtClean="0"/>
-              <a:t>04.09.2025</a:t>
+              <a:t>05.09.2025</a:t>
             </a:fld>
             <a:endParaRPr lang="et-EE" dirty="0"/>
           </a:p>
@@ -1972,7 +1973,7 @@
           <a:p>
             <a:fld id="{CF92296B-3A94-4787-AA7D-8DC0AEE88FD4}" type="datetime1">
               <a:rPr lang="et-EE" smtClean="0"/>
-              <a:t>04.09.2025</a:t>
+              <a:t>05.09.2025</a:t>
             </a:fld>
             <a:endParaRPr lang="et-EE"/>
           </a:p>
@@ -2342,7 +2343,7 @@
           <a:p>
             <a:fld id="{185751C1-87AF-4EAC-9696-BB82432B7753}" type="datetime1">
               <a:rPr lang="et-EE" smtClean="0"/>
-              <a:t>04.09.2025</a:t>
+              <a:t>05.09.2025</a:t>
             </a:fld>
             <a:endParaRPr lang="et-EE"/>
           </a:p>
@@ -2440,7 +2441,7 @@
           <a:p>
             <a:fld id="{E493E3B0-4572-4FE0-8E55-6746BFAADA96}" type="datetime1">
               <a:rPr lang="et-EE" smtClean="0"/>
-              <a:t>04.09.2025</a:t>
+              <a:t>05.09.2025</a:t>
             </a:fld>
             <a:endParaRPr lang="et-EE"/>
           </a:p>
@@ -2585,7 +2586,7 @@
           <a:p>
             <a:fld id="{EE4C4D14-98D7-455C-9D0D-2863E0C0AA0D}" type="datetime1">
               <a:rPr lang="et-EE" smtClean="0"/>
-              <a:t>04.09.2025</a:t>
+              <a:t>05.09.2025</a:t>
             </a:fld>
             <a:endParaRPr lang="et-EE"/>
           </a:p>
@@ -2865,7 +2866,7 @@
           <a:p>
             <a:fld id="{94997DBE-8AE5-4A6F-9E25-F62C693D8ED5}" type="datetime1">
               <a:rPr lang="et-EE" smtClean="0"/>
-              <a:t>04.09.2025</a:t>
+              <a:t>05.09.2025</a:t>
             </a:fld>
             <a:endParaRPr lang="et-EE"/>
           </a:p>
@@ -3125,7 +3126,7 @@
           <a:p>
             <a:fld id="{DA3B51F9-97BE-4EFF-9934-D6DB8E40FF5E}" type="datetime1">
               <a:rPr lang="et-EE" smtClean="0"/>
-              <a:t>04.09.2025</a:t>
+              <a:t>05.09.2025</a:t>
             </a:fld>
             <a:endParaRPr lang="et-EE"/>
           </a:p>
@@ -3342,7 +3343,7 @@
           <a:p>
             <a:fld id="{E7C7EEDD-722C-4F14-9239-A37AD281B51F}" type="datetime1">
               <a:rPr lang="et-EE" smtClean="0"/>
-              <a:t>04.09.2025</a:t>
+              <a:t>05.09.2025</a:t>
             </a:fld>
             <a:endParaRPr lang="et-EE" dirty="0"/>
           </a:p>
@@ -3780,7 +3781,7 @@
         </p:blipFill>
         <p:spPr>
           <a:xfrm>
-            <a:off x="7604226" y="2813566"/>
+            <a:off x="7698274" y="2700626"/>
             <a:ext cx="4493726" cy="3725346"/>
           </a:xfrm>
           <a:prstGeom prst="rect">
@@ -3888,7 +3889,7 @@
                 <a:latin typeface="Arial" panose="020B0604020202020204" pitchFamily="34" charset="0"/>
                 <a:cs typeface="Arial" panose="020B0604020202020204" pitchFamily="34" charset="0"/>
               </a:rPr>
-              <a:t>04.09.2025</a:t>
+              <a:t>05.09.2025</a:t>
             </a:fld>
             <a:endParaRPr lang="et-EE" dirty="0">
               <a:solidFill>
@@ -3985,13 +3986,8 @@
             <a:pPr lvl="1"/>
             <a:r>
               <a:rPr lang="en-US" dirty="0"/>
-              <a:t>I am unsure about the higher order </a:t>
-            </a:r>
-            <a:r>
-              <a:rPr lang="en-US"/>
-              <a:t>mode coupling</a:t>
-            </a:r>
-            <a:endParaRPr lang="en-US" dirty="0"/>
+              <a:t>Philip is helping to design the mounts.</a:t>
+            </a:r>
           </a:p>
         </p:txBody>
       </p:sp>
@@ -4017,7 +4013,7 @@
         </p:blipFill>
         <p:spPr>
           <a:xfrm>
-            <a:off x="572386" y="2524097"/>
+            <a:off x="607527" y="3112320"/>
             <a:ext cx="7772400" cy="1116088"/>
           </a:xfrm>
           <a:prstGeom prst="rect">
@@ -4057,10 +4053,10 @@
       </p:grpSpPr>
       <p:pic>
         <p:nvPicPr>
-          <p:cNvPr id="7" name="Picture 6">
+          <p:cNvPr id="12" name="Picture 11">
             <a:extLst>
               <a:ext uri="{FF2B5EF4-FFF2-40B4-BE49-F238E27FC236}">
-                <a16:creationId xmlns:a16="http://schemas.microsoft.com/office/drawing/2014/main" id="{26EF72B0-E583-42B0-A227-47AD1A176F9B}"/>
+                <a16:creationId xmlns:a16="http://schemas.microsoft.com/office/drawing/2014/main" id="{E53F225F-0B85-4F7E-BA22-7A4AEE567A89}"/>
               </a:ext>
             </a:extLst>
           </p:cNvPr>
@@ -4077,40 +4073,12 @@
         </p:blipFill>
         <p:spPr>
           <a:xfrm>
-            <a:off x="7807721" y="3267739"/>
-            <a:ext cx="4159836" cy="3710763"/>
+            <a:off x="7351633" y="2613913"/>
+            <a:ext cx="3745448" cy="3730181"/>
           </a:xfrm>
           <a:prstGeom prst="rect">
             <a:avLst/>
           </a:prstGeom>
-        </p:spPr>
-      </p:pic>
-      <p:pic>
-        <p:nvPicPr>
-          <p:cNvPr id="9" name="Content Placeholder 8">
-            <a:extLst>
-              <a:ext uri="{FF2B5EF4-FFF2-40B4-BE49-F238E27FC236}">
-                <a16:creationId xmlns:a16="http://schemas.microsoft.com/office/drawing/2014/main" id="{B95EDCFC-8485-4D78-B972-5AB089AC451B}"/>
-              </a:ext>
-            </a:extLst>
-          </p:cNvPr>
-          <p:cNvPicPr>
-            <a:picLocks noGrp="1" noChangeAspect="1"/>
-          </p:cNvPicPr>
-          <p:nvPr>
-            <p:ph idx="1"/>
-          </p:nvPr>
-        </p:nvPicPr>
-        <p:blipFill rotWithShape="1">
-          <a:blip r:embed="rId3"/>
-          <a:srcRect b="6121"/>
-          <a:stretch/>
-        </p:blipFill>
-        <p:spPr>
-          <a:xfrm>
-            <a:off x="7828446" y="454427"/>
-            <a:ext cx="3835327" cy="2974573"/>
-          </a:xfrm>
         </p:spPr>
       </p:pic>
       <p:sp>
@@ -4136,7 +4104,7 @@
           <a:p>
             <a:r>
               <a:rPr lang="en-US" dirty="0"/>
-              <a:t>Vacuum and Thermal</a:t>
+              <a:t>Vacuum Tank and Pumps</a:t>
             </a:r>
             <a:endParaRPr lang="LID4096" dirty="0"/>
           </a:p>
@@ -4165,7 +4133,7 @@
           <a:p>
             <a:fld id="{E1CF8E31-244F-4A6A-A7D5-704B96C48AAE}" type="datetime1">
               <a:rPr lang="et-EE" smtClean="0"/>
-              <a:t>04.09.2025</a:t>
+              <a:t>05.09.2025</a:t>
             </a:fld>
             <a:endParaRPr lang="et-EE" dirty="0"/>
           </a:p>
@@ -4246,7 +4214,7 @@
         <p:spPr>
           <a:xfrm>
             <a:off x="224442" y="1161756"/>
-            <a:ext cx="8158331" cy="4365423"/>
+            <a:ext cx="8685642" cy="4365423"/>
           </a:xfrm>
           <a:prstGeom prst="rect">
             <a:avLst/>
@@ -4423,28 +4391,19 @@
           <a:p>
             <a:r>
               <a:rPr lang="en-US" dirty="0"/>
-              <a:t>Philip designed a shield that can be assembled inside the vacuum tank.</a:t>
-            </a:r>
-          </a:p>
-          <a:p>
-            <a:pPr lvl="1"/>
+              <a:t>Pfeiffer hasn’t gotten back to me yet (with their quote)</a:t>
+            </a:r>
+          </a:p>
+          <a:p>
             <a:r>
               <a:rPr lang="en-US" dirty="0"/>
-              <a:t>Ceramic spheres as spacers between shields.</a:t>
-            </a:r>
-          </a:p>
-          <a:p>
-            <a:pPr lvl="1"/>
-            <a:r>
-              <a:rPr lang="en-US" dirty="0"/>
-              <a:t>Possibility of adding pins for fixing them more in place.</a:t>
-            </a:r>
-          </a:p>
-          <a:p>
-            <a:r>
-              <a:rPr lang="en-US" dirty="0"/>
-              <a:t>Pfeiffer hasn’t gotten back to me yet (with their quote)</a:t>
-            </a:r>
+              <a:t>The plan for the top plate is to have a big </a:t>
+            </a:r>
+            <a:r>
+              <a:rPr lang="en-US"/>
+              <a:t>CF flange.</a:t>
+            </a:r>
+            <a:endParaRPr lang="en-US" dirty="0"/>
           </a:p>
           <a:p>
             <a:r>
@@ -4460,14 +4419,14 @@
             </a:r>
             <a:r>
               <a:rPr lang="en-US" dirty="0"/>
-              <a:t> – turbo and scroll pump setup</a:t>
-            </a:r>
-          </a:p>
-          <a:p>
-            <a:pPr lvl="2"/>
+              <a:t> – turbo and scroll pump together 5k (SAP shop)</a:t>
+            </a:r>
+          </a:p>
+          <a:p>
+            <a:pPr lvl="1"/>
             <a:r>
               <a:rPr lang="en-US" dirty="0"/>
-              <a:t>Might it need a filter for the exhaust?</a:t>
+              <a:t>Waiting for quotes for ion pumps (Gamma Vacuum and Agilent)</a:t>
             </a:r>
           </a:p>
         </p:txBody>
@@ -4502,6 +4461,278 @@
           <a:chExt cx="0" cy="0"/>
         </a:xfrm>
       </p:grpSpPr>
+      <p:pic>
+        <p:nvPicPr>
+          <p:cNvPr id="9" name="Picture 8">
+            <a:extLst>
+              <a:ext uri="{FF2B5EF4-FFF2-40B4-BE49-F238E27FC236}">
+                <a16:creationId xmlns:a16="http://schemas.microsoft.com/office/drawing/2014/main" id="{FD91EF39-3887-4559-B854-441FFF87A313}"/>
+              </a:ext>
+            </a:extLst>
+          </p:cNvPr>
+          <p:cNvPicPr>
+            <a:picLocks noChangeAspect="1"/>
+          </p:cNvPicPr>
+          <p:nvPr/>
+        </p:nvPicPr>
+        <p:blipFill>
+          <a:blip r:embed="rId2"/>
+          <a:stretch>
+            <a:fillRect/>
+          </a:stretch>
+        </p:blipFill>
+        <p:spPr>
+          <a:xfrm>
+            <a:off x="8025015" y="4487875"/>
+            <a:ext cx="3670528" cy="2752896"/>
+          </a:xfrm>
+          <a:prstGeom prst="rect">
+            <a:avLst/>
+          </a:prstGeom>
+        </p:spPr>
+      </p:pic>
+      <p:pic>
+        <p:nvPicPr>
+          <p:cNvPr id="7" name="Content Placeholder 8">
+            <a:extLst>
+              <a:ext uri="{FF2B5EF4-FFF2-40B4-BE49-F238E27FC236}">
+                <a16:creationId xmlns:a16="http://schemas.microsoft.com/office/drawing/2014/main" id="{0C08B5F6-9023-482B-ABA1-04036FBA3D06}"/>
+              </a:ext>
+            </a:extLst>
+          </p:cNvPr>
+          <p:cNvPicPr>
+            <a:picLocks noChangeAspect="1"/>
+          </p:cNvPicPr>
+          <p:nvPr/>
+        </p:nvPicPr>
+        <p:blipFill rotWithShape="1">
+          <a:blip r:embed="rId3"/>
+          <a:srcRect b="6121"/>
+          <a:stretch/>
+        </p:blipFill>
+        <p:spPr>
+          <a:xfrm>
+            <a:off x="8153400" y="136525"/>
+            <a:ext cx="3835327" cy="2974573"/>
+          </a:xfrm>
+          <a:prstGeom prst="rect">
+            <a:avLst/>
+          </a:prstGeom>
+        </p:spPr>
+      </p:pic>
+      <p:sp>
+        <p:nvSpPr>
+          <p:cNvPr id="2" name="Title 1">
+            <a:extLst>
+              <a:ext uri="{FF2B5EF4-FFF2-40B4-BE49-F238E27FC236}">
+                <a16:creationId xmlns:a16="http://schemas.microsoft.com/office/drawing/2014/main" id="{0839EBDD-9EBD-4A8D-8CB9-3280A81CE53C}"/>
+              </a:ext>
+            </a:extLst>
+          </p:cNvPr>
+          <p:cNvSpPr>
+            <a:spLocks noGrp="1"/>
+          </p:cNvSpPr>
+          <p:nvPr>
+            <p:ph type="title"/>
+          </p:nvPr>
+        </p:nvSpPr>
+        <p:spPr/>
+        <p:txBody>
+          <a:bodyPr/>
+          <a:lstStyle/>
+          <a:p>
+            <a:r>
+              <a:rPr lang="en-US" dirty="0"/>
+              <a:t>Thermal Shields</a:t>
+            </a:r>
+            <a:endParaRPr lang="LID4096" dirty="0"/>
+          </a:p>
+        </p:txBody>
+      </p:sp>
+      <p:sp>
+        <p:nvSpPr>
+          <p:cNvPr id="3" name="Content Placeholder 2">
+            <a:extLst>
+              <a:ext uri="{FF2B5EF4-FFF2-40B4-BE49-F238E27FC236}">
+                <a16:creationId xmlns:a16="http://schemas.microsoft.com/office/drawing/2014/main" id="{79A184E2-817F-4847-B058-F9C7A93615BC}"/>
+              </a:ext>
+            </a:extLst>
+          </p:cNvPr>
+          <p:cNvSpPr>
+            <a:spLocks noGrp="1"/>
+          </p:cNvSpPr>
+          <p:nvPr>
+            <p:ph idx="1"/>
+          </p:nvPr>
+        </p:nvSpPr>
+        <p:spPr/>
+        <p:txBody>
+          <a:bodyPr/>
+          <a:lstStyle/>
+          <a:p>
+            <a:r>
+              <a:rPr lang="en-US" dirty="0"/>
+              <a:t>Philip designed a shield that can be assembled inside the vacuum tank.</a:t>
+            </a:r>
+          </a:p>
+          <a:p>
+            <a:pPr lvl="1"/>
+            <a:r>
+              <a:rPr lang="en-US" dirty="0"/>
+              <a:t>Ceramic spheres as spacers between shields.</a:t>
+            </a:r>
+          </a:p>
+          <a:p>
+            <a:pPr lvl="1"/>
+            <a:r>
+              <a:rPr lang="en-US" dirty="0"/>
+              <a:t>Possibility of adding pins for fixing them more in place.</a:t>
+            </a:r>
+          </a:p>
+          <a:p>
+            <a:r>
+              <a:rPr lang="en-US" dirty="0"/>
+              <a:t>Can be polished</a:t>
+            </a:r>
+          </a:p>
+          <a:p>
+            <a:r>
+              <a:rPr lang="en-US" dirty="0"/>
+              <a:t>Top and bottom plates can be in one piece or in four if we might need to assemble them in the tank.</a:t>
+            </a:r>
+          </a:p>
+          <a:p>
+            <a:r>
+              <a:rPr lang="en-US" dirty="0"/>
+              <a:t>The thermal shield assembly will need supports/legs</a:t>
+            </a:r>
+          </a:p>
+          <a:p>
+            <a:pPr lvl="1"/>
+            <a:r>
+              <a:rPr lang="en-US" dirty="0"/>
+              <a:t>These can be bought off the shelf, but Philip is also working on something for another group.</a:t>
+            </a:r>
+          </a:p>
+        </p:txBody>
+      </p:sp>
+      <p:sp>
+        <p:nvSpPr>
+          <p:cNvPr id="4" name="Date Placeholder 3">
+            <a:extLst>
+              <a:ext uri="{FF2B5EF4-FFF2-40B4-BE49-F238E27FC236}">
+                <a16:creationId xmlns:a16="http://schemas.microsoft.com/office/drawing/2014/main" id="{9232D462-139B-4BBE-8E30-D07E52B912CC}"/>
+              </a:ext>
+            </a:extLst>
+          </p:cNvPr>
+          <p:cNvSpPr>
+            <a:spLocks noGrp="1"/>
+          </p:cNvSpPr>
+          <p:nvPr>
+            <p:ph type="dt" sz="half" idx="10"/>
+          </p:nvPr>
+        </p:nvSpPr>
+        <p:spPr/>
+        <p:txBody>
+          <a:bodyPr/>
+          <a:lstStyle/>
+          <a:p>
+            <a:fld id="{E1CF8E31-244F-4A6A-A7D5-704B96C48AAE}" type="datetime1">
+              <a:rPr lang="et-EE" smtClean="0"/>
+              <a:t>05.09.2025</a:t>
+            </a:fld>
+            <a:endParaRPr lang="et-EE" dirty="0"/>
+          </a:p>
+        </p:txBody>
+      </p:sp>
+      <p:sp>
+        <p:nvSpPr>
+          <p:cNvPr id="5" name="Footer Placeholder 4">
+            <a:extLst>
+              <a:ext uri="{FF2B5EF4-FFF2-40B4-BE49-F238E27FC236}">
+                <a16:creationId xmlns:a16="http://schemas.microsoft.com/office/drawing/2014/main" id="{21CA93EA-B59C-4B41-BFE3-0DAD5FA5063D}"/>
+              </a:ext>
+            </a:extLst>
+          </p:cNvPr>
+          <p:cNvSpPr>
+            <a:spLocks noGrp="1"/>
+          </p:cNvSpPr>
+          <p:nvPr>
+            <p:ph type="ftr" sz="quarter" idx="11"/>
+          </p:nvPr>
+        </p:nvSpPr>
+        <p:spPr/>
+        <p:txBody>
+          <a:bodyPr/>
+          <a:lstStyle/>
+          <a:p>
+            <a:r>
+              <a:rPr lang="et-EE"/>
+              <a:t>Weekly</a:t>
+            </a:r>
+          </a:p>
+        </p:txBody>
+      </p:sp>
+      <p:sp>
+        <p:nvSpPr>
+          <p:cNvPr id="6" name="Slide Number Placeholder 5">
+            <a:extLst>
+              <a:ext uri="{FF2B5EF4-FFF2-40B4-BE49-F238E27FC236}">
+                <a16:creationId xmlns:a16="http://schemas.microsoft.com/office/drawing/2014/main" id="{B6D75013-56EF-4A65-A111-97DB05C0C363}"/>
+              </a:ext>
+            </a:extLst>
+          </p:cNvPr>
+          <p:cNvSpPr>
+            <a:spLocks noGrp="1"/>
+          </p:cNvSpPr>
+          <p:nvPr>
+            <p:ph type="sldNum" sz="quarter" idx="12"/>
+          </p:nvPr>
+        </p:nvSpPr>
+        <p:spPr/>
+        <p:txBody>
+          <a:bodyPr/>
+          <a:lstStyle/>
+          <a:p>
+            <a:fld id="{9F39E346-B1F3-4075-BD67-234EF0F10AC6}" type="slidenum">
+              <a:rPr lang="et-EE" smtClean="0"/>
+              <a:pPr/>
+              <a:t>3</a:t>
+            </a:fld>
+            <a:endParaRPr lang="et-EE" dirty="0"/>
+          </a:p>
+        </p:txBody>
+      </p:sp>
+    </p:spTree>
+    <p:extLst>
+      <p:ext uri="{BB962C8B-B14F-4D97-AF65-F5344CB8AC3E}">
+        <p14:creationId xmlns:p14="http://schemas.microsoft.com/office/powerpoint/2010/main" val="1424238953"/>
+      </p:ext>
+    </p:extLst>
+  </p:cSld>
+  <p:clrMapOvr>
+    <a:masterClrMapping/>
+  </p:clrMapOvr>
+</p:sld>
+</file>
+
+<file path=ppt/slides/slide4.xml><?xml version="1.0" encoding="utf-8"?>
+<p:sld xmlns:a="http://schemas.openxmlformats.org/drawingml/2006/main" xmlns:r="http://schemas.openxmlformats.org/officeDocument/2006/relationships" xmlns:p="http://schemas.openxmlformats.org/presentationml/2006/main">
+  <p:cSld>
+    <p:spTree>
+      <p:nvGrpSpPr>
+        <p:cNvPr id="1" name=""/>
+        <p:cNvGrpSpPr/>
+        <p:nvPr/>
+      </p:nvGrpSpPr>
+      <p:grpSpPr>
+        <a:xfrm>
+          <a:off x="0" y="0"/>
+          <a:ext cx="0" cy="0"/>
+          <a:chOff x="0" y="0"/>
+          <a:chExt cx="0" cy="0"/>
+        </a:xfrm>
+      </p:grpSpPr>
       <p:sp>
         <p:nvSpPr>
           <p:cNvPr id="2" name="Title 1">
@@ -4531,41 +4762,48 @@
           </a:p>
         </p:txBody>
       </p:sp>
-      <p:sp>
-        <p:nvSpPr>
-          <p:cNvPr id="3" name="Content Placeholder 2">
+      <p:pic>
+        <p:nvPicPr>
+          <p:cNvPr id="8" name="Content Placeholder 7">
             <a:extLst>
               <a:ext uri="{FF2B5EF4-FFF2-40B4-BE49-F238E27FC236}">
-                <a16:creationId xmlns:a16="http://schemas.microsoft.com/office/drawing/2014/main" id="{2FD78668-567E-4A31-83DD-5C04A8314998}"/>
+                <a16:creationId xmlns:a16="http://schemas.microsoft.com/office/drawing/2014/main" id="{A40245A2-5917-45B0-8D1B-F2D04EBAAD60}"/>
               </a:ext>
             </a:extLst>
           </p:cNvPr>
-          <p:cNvSpPr>
-            <a:spLocks noGrp="1"/>
-          </p:cNvSpPr>
+          <p:cNvPicPr>
+            <a:picLocks noGrp="1" noChangeAspect="1"/>
+          </p:cNvPicPr>
           <p:nvPr>
             <p:ph idx="1"/>
           </p:nvPr>
-        </p:nvSpPr>
-        <p:spPr/>
-        <p:txBody>
-          <a:bodyPr/>
-          <a:lstStyle/>
-          <a:p>
-            <a:r>
-              <a:rPr lang="en-US" dirty="0"/>
-              <a:t>Table ordered now</a:t>
-            </a:r>
-          </a:p>
-          <a:p>
-            <a:r>
-              <a:rPr lang="en-US"/>
-              <a:t>Room empty</a:t>
-            </a:r>
-            <a:endParaRPr lang="LID4096"/>
-          </a:p>
-        </p:txBody>
-      </p:sp>
+        </p:nvPicPr>
+        <p:blipFill>
+          <a:blip r:embed="rId2"/>
+          <a:stretch>
+            <a:fillRect/>
+          </a:stretch>
+        </p:blipFill>
+        <p:spPr>
+          <a:xfrm>
+            <a:off x="6805682" y="2845669"/>
+            <a:ext cx="3980446" cy="2996996"/>
+          </a:xfrm>
+          <a:prstGeom prst="rect">
+            <a:avLst/>
+          </a:prstGeom>
+          <a:ln w="228600" cap="sq" cmpd="thickThin">
+            <a:noFill/>
+            <a:prstDash val="solid"/>
+            <a:miter lim="800000"/>
+          </a:ln>
+          <a:effectLst>
+            <a:innerShdw blurRad="76200">
+              <a:srgbClr val="000000"/>
+            </a:innerShdw>
+          </a:effectLst>
+        </p:spPr>
+      </p:pic>
       <p:sp>
         <p:nvSpPr>
           <p:cNvPr id="4" name="Date Placeholder 3">
@@ -4589,7 +4827,7 @@
           <a:p>
             <a:fld id="{E1CF8E31-244F-4A6A-A7D5-704B96C48AAE}" type="datetime1">
               <a:rPr lang="et-EE" smtClean="0"/>
-              <a:t>04.09.2025</a:t>
+              <a:t>05.09.2025</a:t>
             </a:fld>
             <a:endParaRPr lang="et-EE" dirty="0"/>
           </a:p>
@@ -4647,9 +4885,492 @@
             <a:fld id="{9F39E346-B1F3-4075-BD67-234EF0F10AC6}" type="slidenum">
               <a:rPr lang="et-EE" smtClean="0"/>
               <a:pPr/>
-              <a:t>3</a:t>
+              <a:t>4</a:t>
             </a:fld>
             <a:endParaRPr lang="et-EE" dirty="0"/>
+          </a:p>
+        </p:txBody>
+      </p:sp>
+      <p:sp>
+        <p:nvSpPr>
+          <p:cNvPr id="11" name="Content Placeholder 10">
+            <a:extLst>
+              <a:ext uri="{FF2B5EF4-FFF2-40B4-BE49-F238E27FC236}">
+                <a16:creationId xmlns:a16="http://schemas.microsoft.com/office/drawing/2014/main" id="{2DDA149F-801E-4E34-AD99-11716FFC5415}"/>
+              </a:ext>
+            </a:extLst>
+          </p:cNvPr>
+          <p:cNvSpPr txBox="1">
+            <a:spLocks/>
+          </p:cNvSpPr>
+          <p:nvPr/>
+        </p:nvSpPr>
+        <p:spPr>
+          <a:xfrm>
+            <a:off x="224442" y="1161756"/>
+            <a:ext cx="8158331" cy="4365423"/>
+          </a:xfrm>
+          <a:prstGeom prst="rect">
+            <a:avLst/>
+          </a:prstGeom>
+        </p:spPr>
+        <p:txBody>
+          <a:bodyPr vert="horz" lIns="91440" tIns="45720" rIns="91440" bIns="45720" rtlCol="0">
+            <a:normAutofit/>
+          </a:bodyPr>
+          <a:lstStyle>
+            <a:lvl1pPr marL="91440" indent="-228600" algn="l" defTabSz="914400" rtl="0" eaLnBrk="1" latinLnBrk="0" hangingPunct="1">
+              <a:lnSpc>
+                <a:spcPct val="100000"/>
+              </a:lnSpc>
+              <a:spcBef>
+                <a:spcPts val="1000"/>
+              </a:spcBef>
+              <a:buFont typeface="Arial" panose="020B0604020202020204" pitchFamily="34" charset="0"/>
+              <a:buChar char="•"/>
+              <a:defRPr sz="2400" b="0" kern="1200">
+                <a:solidFill>
+                  <a:srgbClr val="667982"/>
+                </a:solidFill>
+                <a:latin typeface="Arial" panose="020B0604020202020204" pitchFamily="34" charset="0"/>
+                <a:ea typeface="+mn-ea"/>
+                <a:cs typeface="Arial" panose="020B0604020202020204" pitchFamily="34" charset="0"/>
+              </a:defRPr>
+            </a:lvl1pPr>
+            <a:lvl2pPr marL="685800" indent="-228600" algn="l" defTabSz="914400" rtl="0" eaLnBrk="1" latinLnBrk="0" hangingPunct="1">
+              <a:lnSpc>
+                <a:spcPct val="100000"/>
+              </a:lnSpc>
+              <a:spcBef>
+                <a:spcPts val="500"/>
+              </a:spcBef>
+              <a:buFont typeface="Arial" panose="020B0604020202020204" pitchFamily="34" charset="0"/>
+              <a:buChar char="•"/>
+              <a:defRPr sz="2400" b="0" kern="1200">
+                <a:solidFill>
+                  <a:srgbClr val="667982"/>
+                </a:solidFill>
+                <a:latin typeface="Arial" panose="020B0604020202020204" pitchFamily="34" charset="0"/>
+                <a:ea typeface="+mn-ea"/>
+                <a:cs typeface="Arial" panose="020B0604020202020204" pitchFamily="34" charset="0"/>
+              </a:defRPr>
+            </a:lvl2pPr>
+            <a:lvl3pPr marL="1143000" indent="-228600" algn="l" defTabSz="914400" rtl="0" eaLnBrk="1" latinLnBrk="0" hangingPunct="1">
+              <a:lnSpc>
+                <a:spcPct val="100000"/>
+              </a:lnSpc>
+              <a:spcBef>
+                <a:spcPts val="500"/>
+              </a:spcBef>
+              <a:buFont typeface="Arial" panose="020B0604020202020204" pitchFamily="34" charset="0"/>
+              <a:buChar char="•"/>
+              <a:defRPr sz="2000" b="0" kern="1200">
+                <a:solidFill>
+                  <a:srgbClr val="667982"/>
+                </a:solidFill>
+                <a:latin typeface="Arial" panose="020B0604020202020204" pitchFamily="34" charset="0"/>
+                <a:ea typeface="+mn-ea"/>
+                <a:cs typeface="Arial" panose="020B0604020202020204" pitchFamily="34" charset="0"/>
+              </a:defRPr>
+            </a:lvl3pPr>
+            <a:lvl4pPr marL="1600200" indent="-228600" algn="l" defTabSz="914400" rtl="0" eaLnBrk="1" latinLnBrk="0" hangingPunct="1">
+              <a:lnSpc>
+                <a:spcPct val="100000"/>
+              </a:lnSpc>
+              <a:spcBef>
+                <a:spcPts val="500"/>
+              </a:spcBef>
+              <a:buFont typeface="Arial" panose="020B0604020202020204" pitchFamily="34" charset="0"/>
+              <a:buChar char="•"/>
+              <a:defRPr sz="1800" b="0" kern="1200">
+                <a:solidFill>
+                  <a:srgbClr val="667982"/>
+                </a:solidFill>
+                <a:latin typeface="Arial" panose="020B0604020202020204" pitchFamily="34" charset="0"/>
+                <a:ea typeface="+mn-ea"/>
+                <a:cs typeface="Arial" panose="020B0604020202020204" pitchFamily="34" charset="0"/>
+              </a:defRPr>
+            </a:lvl4pPr>
+            <a:lvl5pPr marL="2057400" indent="-228600" algn="l" defTabSz="914400" rtl="0" eaLnBrk="1" latinLnBrk="0" hangingPunct="1">
+              <a:lnSpc>
+                <a:spcPct val="100000"/>
+              </a:lnSpc>
+              <a:spcBef>
+                <a:spcPts val="500"/>
+              </a:spcBef>
+              <a:buFont typeface="Arial" panose="020B0604020202020204" pitchFamily="34" charset="0"/>
+              <a:buChar char="•"/>
+              <a:defRPr sz="1800" b="0" kern="1200">
+                <a:solidFill>
+                  <a:srgbClr val="667982"/>
+                </a:solidFill>
+                <a:latin typeface="Arial" panose="020B0604020202020204" pitchFamily="34" charset="0"/>
+                <a:ea typeface="+mn-ea"/>
+                <a:cs typeface="Arial" panose="020B0604020202020204" pitchFamily="34" charset="0"/>
+              </a:defRPr>
+            </a:lvl5pPr>
+            <a:lvl6pPr marL="2514600" indent="-228600" algn="l" defTabSz="914400" rtl="0" eaLnBrk="1" latinLnBrk="0" hangingPunct="1">
+              <a:lnSpc>
+                <a:spcPct val="90000"/>
+              </a:lnSpc>
+              <a:spcBef>
+                <a:spcPts val="500"/>
+              </a:spcBef>
+              <a:buFont typeface="Arial" panose="020B0604020202020204" pitchFamily="34" charset="0"/>
+              <a:buChar char="•"/>
+              <a:defRPr sz="1800" kern="1200">
+                <a:solidFill>
+                  <a:schemeClr val="tx1"/>
+                </a:solidFill>
+                <a:latin typeface="+mn-lt"/>
+                <a:ea typeface="+mn-ea"/>
+                <a:cs typeface="+mn-cs"/>
+              </a:defRPr>
+            </a:lvl6pPr>
+            <a:lvl7pPr marL="2971800" indent="-228600" algn="l" defTabSz="914400" rtl="0" eaLnBrk="1" latinLnBrk="0" hangingPunct="1">
+              <a:lnSpc>
+                <a:spcPct val="90000"/>
+              </a:lnSpc>
+              <a:spcBef>
+                <a:spcPts val="500"/>
+              </a:spcBef>
+              <a:buFont typeface="Arial" panose="020B0604020202020204" pitchFamily="34" charset="0"/>
+              <a:buChar char="•"/>
+              <a:defRPr sz="1800" kern="1200">
+                <a:solidFill>
+                  <a:schemeClr val="tx1"/>
+                </a:solidFill>
+                <a:latin typeface="+mn-lt"/>
+                <a:ea typeface="+mn-ea"/>
+                <a:cs typeface="+mn-cs"/>
+              </a:defRPr>
+            </a:lvl7pPr>
+            <a:lvl8pPr marL="3429000" indent="-228600" algn="l" defTabSz="914400" rtl="0" eaLnBrk="1" latinLnBrk="0" hangingPunct="1">
+              <a:lnSpc>
+                <a:spcPct val="90000"/>
+              </a:lnSpc>
+              <a:spcBef>
+                <a:spcPts val="500"/>
+              </a:spcBef>
+              <a:buFont typeface="Arial" panose="020B0604020202020204" pitchFamily="34" charset="0"/>
+              <a:buChar char="•"/>
+              <a:defRPr sz="1800" kern="1200">
+                <a:solidFill>
+                  <a:schemeClr val="tx1"/>
+                </a:solidFill>
+                <a:latin typeface="+mn-lt"/>
+                <a:ea typeface="+mn-ea"/>
+                <a:cs typeface="+mn-cs"/>
+              </a:defRPr>
+            </a:lvl8pPr>
+            <a:lvl9pPr marL="3886200" indent="-228600" algn="l" defTabSz="914400" rtl="0" eaLnBrk="1" latinLnBrk="0" hangingPunct="1">
+              <a:lnSpc>
+                <a:spcPct val="90000"/>
+              </a:lnSpc>
+              <a:spcBef>
+                <a:spcPts val="500"/>
+              </a:spcBef>
+              <a:buFont typeface="Arial" panose="020B0604020202020204" pitchFamily="34" charset="0"/>
+              <a:buChar char="•"/>
+              <a:defRPr sz="1800" kern="1200">
+                <a:solidFill>
+                  <a:schemeClr val="tx1"/>
+                </a:solidFill>
+                <a:latin typeface="+mn-lt"/>
+                <a:ea typeface="+mn-ea"/>
+                <a:cs typeface="+mn-cs"/>
+              </a:defRPr>
+            </a:lvl9pPr>
+          </a:lstStyle>
+          <a:p>
+            <a:endParaRPr lang="en-US" dirty="0"/>
+          </a:p>
+        </p:txBody>
+      </p:sp>
+      <p:sp>
+        <p:nvSpPr>
+          <p:cNvPr id="12" name="Content Placeholder 10">
+            <a:extLst>
+              <a:ext uri="{FF2B5EF4-FFF2-40B4-BE49-F238E27FC236}">
+                <a16:creationId xmlns:a16="http://schemas.microsoft.com/office/drawing/2014/main" id="{995E78DD-713B-490B-A161-FA77BD39727E}"/>
+              </a:ext>
+            </a:extLst>
+          </p:cNvPr>
+          <p:cNvSpPr txBox="1">
+            <a:spLocks/>
+          </p:cNvSpPr>
+          <p:nvPr/>
+        </p:nvSpPr>
+        <p:spPr>
+          <a:xfrm>
+            <a:off x="376842" y="1314156"/>
+            <a:ext cx="8158331" cy="4365423"/>
+          </a:xfrm>
+          <a:prstGeom prst="rect">
+            <a:avLst/>
+          </a:prstGeom>
+        </p:spPr>
+        <p:txBody>
+          <a:bodyPr vert="horz" lIns="91440" tIns="45720" rIns="91440" bIns="45720" rtlCol="0">
+            <a:normAutofit/>
+          </a:bodyPr>
+          <a:lstStyle>
+            <a:lvl1pPr marL="91440" indent="-228600" algn="l" defTabSz="914400" rtl="0" eaLnBrk="1" latinLnBrk="0" hangingPunct="1">
+              <a:lnSpc>
+                <a:spcPct val="100000"/>
+              </a:lnSpc>
+              <a:spcBef>
+                <a:spcPts val="1000"/>
+              </a:spcBef>
+              <a:buFont typeface="Arial" panose="020B0604020202020204" pitchFamily="34" charset="0"/>
+              <a:buChar char="•"/>
+              <a:defRPr sz="2400" b="0" kern="1200">
+                <a:solidFill>
+                  <a:srgbClr val="667982"/>
+                </a:solidFill>
+                <a:latin typeface="Arial" panose="020B0604020202020204" pitchFamily="34" charset="0"/>
+                <a:ea typeface="+mn-ea"/>
+                <a:cs typeface="Arial" panose="020B0604020202020204" pitchFamily="34" charset="0"/>
+              </a:defRPr>
+            </a:lvl1pPr>
+            <a:lvl2pPr marL="685800" indent="-228600" algn="l" defTabSz="914400" rtl="0" eaLnBrk="1" latinLnBrk="0" hangingPunct="1">
+              <a:lnSpc>
+                <a:spcPct val="100000"/>
+              </a:lnSpc>
+              <a:spcBef>
+                <a:spcPts val="500"/>
+              </a:spcBef>
+              <a:buFont typeface="Arial" panose="020B0604020202020204" pitchFamily="34" charset="0"/>
+              <a:buChar char="•"/>
+              <a:defRPr sz="2400" b="0" kern="1200">
+                <a:solidFill>
+                  <a:srgbClr val="667982"/>
+                </a:solidFill>
+                <a:latin typeface="Arial" panose="020B0604020202020204" pitchFamily="34" charset="0"/>
+                <a:ea typeface="+mn-ea"/>
+                <a:cs typeface="Arial" panose="020B0604020202020204" pitchFamily="34" charset="0"/>
+              </a:defRPr>
+            </a:lvl2pPr>
+            <a:lvl3pPr marL="1143000" indent="-228600" algn="l" defTabSz="914400" rtl="0" eaLnBrk="1" latinLnBrk="0" hangingPunct="1">
+              <a:lnSpc>
+                <a:spcPct val="100000"/>
+              </a:lnSpc>
+              <a:spcBef>
+                <a:spcPts val="500"/>
+              </a:spcBef>
+              <a:buFont typeface="Arial" panose="020B0604020202020204" pitchFamily="34" charset="0"/>
+              <a:buChar char="•"/>
+              <a:defRPr sz="2000" b="0" kern="1200">
+                <a:solidFill>
+                  <a:srgbClr val="667982"/>
+                </a:solidFill>
+                <a:latin typeface="Arial" panose="020B0604020202020204" pitchFamily="34" charset="0"/>
+                <a:ea typeface="+mn-ea"/>
+                <a:cs typeface="Arial" panose="020B0604020202020204" pitchFamily="34" charset="0"/>
+              </a:defRPr>
+            </a:lvl3pPr>
+            <a:lvl4pPr marL="1600200" indent="-228600" algn="l" defTabSz="914400" rtl="0" eaLnBrk="1" latinLnBrk="0" hangingPunct="1">
+              <a:lnSpc>
+                <a:spcPct val="100000"/>
+              </a:lnSpc>
+              <a:spcBef>
+                <a:spcPts val="500"/>
+              </a:spcBef>
+              <a:buFont typeface="Arial" panose="020B0604020202020204" pitchFamily="34" charset="0"/>
+              <a:buChar char="•"/>
+              <a:defRPr sz="1800" b="0" kern="1200">
+                <a:solidFill>
+                  <a:srgbClr val="667982"/>
+                </a:solidFill>
+                <a:latin typeface="Arial" panose="020B0604020202020204" pitchFamily="34" charset="0"/>
+                <a:ea typeface="+mn-ea"/>
+                <a:cs typeface="Arial" panose="020B0604020202020204" pitchFamily="34" charset="0"/>
+              </a:defRPr>
+            </a:lvl4pPr>
+            <a:lvl5pPr marL="2057400" indent="-228600" algn="l" defTabSz="914400" rtl="0" eaLnBrk="1" latinLnBrk="0" hangingPunct="1">
+              <a:lnSpc>
+                <a:spcPct val="100000"/>
+              </a:lnSpc>
+              <a:spcBef>
+                <a:spcPts val="500"/>
+              </a:spcBef>
+              <a:buFont typeface="Arial" panose="020B0604020202020204" pitchFamily="34" charset="0"/>
+              <a:buChar char="•"/>
+              <a:defRPr sz="1800" b="0" kern="1200">
+                <a:solidFill>
+                  <a:srgbClr val="667982"/>
+                </a:solidFill>
+                <a:latin typeface="Arial" panose="020B0604020202020204" pitchFamily="34" charset="0"/>
+                <a:ea typeface="+mn-ea"/>
+                <a:cs typeface="Arial" panose="020B0604020202020204" pitchFamily="34" charset="0"/>
+              </a:defRPr>
+            </a:lvl5pPr>
+            <a:lvl6pPr marL="2514600" indent="-228600" algn="l" defTabSz="914400" rtl="0" eaLnBrk="1" latinLnBrk="0" hangingPunct="1">
+              <a:lnSpc>
+                <a:spcPct val="90000"/>
+              </a:lnSpc>
+              <a:spcBef>
+                <a:spcPts val="500"/>
+              </a:spcBef>
+              <a:buFont typeface="Arial" panose="020B0604020202020204" pitchFamily="34" charset="0"/>
+              <a:buChar char="•"/>
+              <a:defRPr sz="1800" kern="1200">
+                <a:solidFill>
+                  <a:schemeClr val="tx1"/>
+                </a:solidFill>
+                <a:latin typeface="+mn-lt"/>
+                <a:ea typeface="+mn-ea"/>
+                <a:cs typeface="+mn-cs"/>
+              </a:defRPr>
+            </a:lvl6pPr>
+            <a:lvl7pPr marL="2971800" indent="-228600" algn="l" defTabSz="914400" rtl="0" eaLnBrk="1" latinLnBrk="0" hangingPunct="1">
+              <a:lnSpc>
+                <a:spcPct val="90000"/>
+              </a:lnSpc>
+              <a:spcBef>
+                <a:spcPts val="500"/>
+              </a:spcBef>
+              <a:buFont typeface="Arial" panose="020B0604020202020204" pitchFamily="34" charset="0"/>
+              <a:buChar char="•"/>
+              <a:defRPr sz="1800" kern="1200">
+                <a:solidFill>
+                  <a:schemeClr val="tx1"/>
+                </a:solidFill>
+                <a:latin typeface="+mn-lt"/>
+                <a:ea typeface="+mn-ea"/>
+                <a:cs typeface="+mn-cs"/>
+              </a:defRPr>
+            </a:lvl7pPr>
+            <a:lvl8pPr marL="3429000" indent="-228600" algn="l" defTabSz="914400" rtl="0" eaLnBrk="1" latinLnBrk="0" hangingPunct="1">
+              <a:lnSpc>
+                <a:spcPct val="90000"/>
+              </a:lnSpc>
+              <a:spcBef>
+                <a:spcPts val="500"/>
+              </a:spcBef>
+              <a:buFont typeface="Arial" panose="020B0604020202020204" pitchFamily="34" charset="0"/>
+              <a:buChar char="•"/>
+              <a:defRPr sz="1800" kern="1200">
+                <a:solidFill>
+                  <a:schemeClr val="tx1"/>
+                </a:solidFill>
+                <a:latin typeface="+mn-lt"/>
+                <a:ea typeface="+mn-ea"/>
+                <a:cs typeface="+mn-cs"/>
+              </a:defRPr>
+            </a:lvl8pPr>
+            <a:lvl9pPr marL="3886200" indent="-228600" algn="l" defTabSz="914400" rtl="0" eaLnBrk="1" latinLnBrk="0" hangingPunct="1">
+              <a:lnSpc>
+                <a:spcPct val="90000"/>
+              </a:lnSpc>
+              <a:spcBef>
+                <a:spcPts val="500"/>
+              </a:spcBef>
+              <a:buFont typeface="Arial" panose="020B0604020202020204" pitchFamily="34" charset="0"/>
+              <a:buChar char="•"/>
+              <a:defRPr sz="1800" kern="1200">
+                <a:solidFill>
+                  <a:schemeClr val="tx1"/>
+                </a:solidFill>
+                <a:latin typeface="+mn-lt"/>
+                <a:ea typeface="+mn-ea"/>
+                <a:cs typeface="+mn-cs"/>
+              </a:defRPr>
+            </a:lvl9pPr>
+          </a:lstStyle>
+          <a:p>
+            <a:r>
+              <a:rPr lang="en-US" dirty="0"/>
+              <a:t>The table will be shipped on the 24</a:t>
+            </a:r>
+            <a:r>
+              <a:rPr lang="en-US" baseline="30000" dirty="0"/>
+              <a:t>th</a:t>
+            </a:r>
+            <a:r>
+              <a:rPr lang="en-US" dirty="0"/>
+              <a:t>.</a:t>
+            </a:r>
+          </a:p>
+          <a:p>
+            <a:r>
+              <a:rPr lang="en-US" dirty="0"/>
+              <a:t>Niko will take care of the interlock and laser safety wall </a:t>
+            </a:r>
+          </a:p>
+          <a:p>
+            <a:endParaRPr lang="en-US" dirty="0"/>
+          </a:p>
+        </p:txBody>
+      </p:sp>
+      <p:pic>
+        <p:nvPicPr>
+          <p:cNvPr id="14" name="Picture 13">
+            <a:extLst>
+              <a:ext uri="{FF2B5EF4-FFF2-40B4-BE49-F238E27FC236}">
+                <a16:creationId xmlns:a16="http://schemas.microsoft.com/office/drawing/2014/main" id="{E4A14760-848F-4AC5-8D72-392476CFB234}"/>
+              </a:ext>
+            </a:extLst>
+          </p:cNvPr>
+          <p:cNvPicPr>
+            <a:picLocks noChangeAspect="1"/>
+          </p:cNvPicPr>
+          <p:nvPr/>
+        </p:nvPicPr>
+        <p:blipFill>
+          <a:blip r:embed="rId3"/>
+          <a:stretch>
+            <a:fillRect/>
+          </a:stretch>
+        </p:blipFill>
+        <p:spPr>
+          <a:xfrm>
+            <a:off x="1331390" y="2520248"/>
+            <a:ext cx="4054929" cy="3520616"/>
+          </a:xfrm>
+          <a:prstGeom prst="rect">
+            <a:avLst/>
+          </a:prstGeom>
+        </p:spPr>
+      </p:pic>
+      <p:sp>
+        <p:nvSpPr>
+          <p:cNvPr id="15" name="TextBox 14">
+            <a:extLst>
+              <a:ext uri="{FF2B5EF4-FFF2-40B4-BE49-F238E27FC236}">
+                <a16:creationId xmlns:a16="http://schemas.microsoft.com/office/drawing/2014/main" id="{3042A994-5E49-4B1A-B306-9E89ED376239}"/>
+              </a:ext>
+            </a:extLst>
+          </p:cNvPr>
+          <p:cNvSpPr txBox="1"/>
+          <p:nvPr/>
+        </p:nvSpPr>
+        <p:spPr>
+          <a:xfrm>
+            <a:off x="8022210" y="5871587"/>
+            <a:ext cx="2710039" cy="338554"/>
+          </a:xfrm>
+          <a:prstGeom prst="rect">
+            <a:avLst/>
+          </a:prstGeom>
+          <a:noFill/>
+        </p:spPr>
+        <p:txBody>
+          <a:bodyPr wrap="square" rtlCol="0">
+            <a:spAutoFit/>
+          </a:bodyPr>
+          <a:lstStyle/>
+          <a:p>
+            <a:r>
+              <a:rPr lang="en-US" sz="1600" dirty="0">
+                <a:solidFill>
+                  <a:srgbClr val="667982"/>
+                </a:solidFill>
+                <a:latin typeface="Arial" panose="020B0604020202020204" pitchFamily="34" charset="0"/>
+                <a:cs typeface="Arial" panose="020B0604020202020204" pitchFamily="34" charset="0"/>
+              </a:rPr>
+              <a:t>The room is empty.</a:t>
+            </a:r>
           </a:p>
         </p:txBody>
       </p:sp>
